--- a/report/New Microsoft PowerPoint Presentation.pptx
+++ b/report/New Microsoft PowerPoint Presentation.pptx
@@ -7,6 +7,8 @@
   <p:sldIdLst>
     <p:sldId id="257" r:id="rId2"/>
     <p:sldId id="256" r:id="rId3"/>
+    <p:sldId id="259" r:id="rId4"/>
+    <p:sldId id="258" r:id="rId5"/>
   </p:sldIdLst>
   <p:sldSz cx="12192000" cy="6858000"/>
   <p:notesSz cx="6858000" cy="9144000"/>
@@ -260,7 +262,7 @@
           <a:p>
             <a:fld id="{4D6ADFE3-4495-426A-847C-CA5A873F23AC}" type="datetimeFigureOut">
               <a:rPr lang="en-US" smtClean="0"/>
-              <a:t>4/27/2026</a:t>
+              <a:t>4/28/2026</a:t>
             </a:fld>
             <a:endParaRPr lang="en-US"/>
           </a:p>
@@ -458,7 +460,7 @@
           <a:p>
             <a:fld id="{4D6ADFE3-4495-426A-847C-CA5A873F23AC}" type="datetimeFigureOut">
               <a:rPr lang="en-US" smtClean="0"/>
-              <a:t>4/27/2026</a:t>
+              <a:t>4/28/2026</a:t>
             </a:fld>
             <a:endParaRPr lang="en-US"/>
           </a:p>
@@ -666,7 +668,7 @@
           <a:p>
             <a:fld id="{4D6ADFE3-4495-426A-847C-CA5A873F23AC}" type="datetimeFigureOut">
               <a:rPr lang="en-US" smtClean="0"/>
-              <a:t>4/27/2026</a:t>
+              <a:t>4/28/2026</a:t>
             </a:fld>
             <a:endParaRPr lang="en-US"/>
           </a:p>
@@ -864,7 +866,7 @@
           <a:p>
             <a:fld id="{4D6ADFE3-4495-426A-847C-CA5A873F23AC}" type="datetimeFigureOut">
               <a:rPr lang="en-US" smtClean="0"/>
-              <a:t>4/27/2026</a:t>
+              <a:t>4/28/2026</a:t>
             </a:fld>
             <a:endParaRPr lang="en-US"/>
           </a:p>
@@ -1139,7 +1141,7 @@
           <a:p>
             <a:fld id="{4D6ADFE3-4495-426A-847C-CA5A873F23AC}" type="datetimeFigureOut">
               <a:rPr lang="en-US" smtClean="0"/>
-              <a:t>4/27/2026</a:t>
+              <a:t>4/28/2026</a:t>
             </a:fld>
             <a:endParaRPr lang="en-US"/>
           </a:p>
@@ -1404,7 +1406,7 @@
           <a:p>
             <a:fld id="{4D6ADFE3-4495-426A-847C-CA5A873F23AC}" type="datetimeFigureOut">
               <a:rPr lang="en-US" smtClean="0"/>
-              <a:t>4/27/2026</a:t>
+              <a:t>4/28/2026</a:t>
             </a:fld>
             <a:endParaRPr lang="en-US"/>
           </a:p>
@@ -1816,7 +1818,7 @@
           <a:p>
             <a:fld id="{4D6ADFE3-4495-426A-847C-CA5A873F23AC}" type="datetimeFigureOut">
               <a:rPr lang="en-US" smtClean="0"/>
-              <a:t>4/27/2026</a:t>
+              <a:t>4/28/2026</a:t>
             </a:fld>
             <a:endParaRPr lang="en-US"/>
           </a:p>
@@ -1957,7 +1959,7 @@
           <a:p>
             <a:fld id="{4D6ADFE3-4495-426A-847C-CA5A873F23AC}" type="datetimeFigureOut">
               <a:rPr lang="en-US" smtClean="0"/>
-              <a:t>4/27/2026</a:t>
+              <a:t>4/28/2026</a:t>
             </a:fld>
             <a:endParaRPr lang="en-US"/>
           </a:p>
@@ -2070,7 +2072,7 @@
           <a:p>
             <a:fld id="{4D6ADFE3-4495-426A-847C-CA5A873F23AC}" type="datetimeFigureOut">
               <a:rPr lang="en-US" smtClean="0"/>
-              <a:t>4/27/2026</a:t>
+              <a:t>4/28/2026</a:t>
             </a:fld>
             <a:endParaRPr lang="en-US"/>
           </a:p>
@@ -2381,7 +2383,7 @@
           <a:p>
             <a:fld id="{4D6ADFE3-4495-426A-847C-CA5A873F23AC}" type="datetimeFigureOut">
               <a:rPr lang="en-US" smtClean="0"/>
-              <a:t>4/27/2026</a:t>
+              <a:t>4/28/2026</a:t>
             </a:fld>
             <a:endParaRPr lang="en-US"/>
           </a:p>
@@ -2669,7 +2671,7 @@
           <a:p>
             <a:fld id="{4D6ADFE3-4495-426A-847C-CA5A873F23AC}" type="datetimeFigureOut">
               <a:rPr lang="en-US" smtClean="0"/>
-              <a:t>4/27/2026</a:t>
+              <a:t>4/28/2026</a:t>
             </a:fld>
             <a:endParaRPr lang="en-US"/>
           </a:p>
@@ -2910,7 +2912,7 @@
           <a:p>
             <a:fld id="{4D6ADFE3-4495-426A-847C-CA5A873F23AC}" type="datetimeFigureOut">
               <a:rPr lang="en-US" smtClean="0"/>
-              <a:t>4/27/2026</a:t>
+              <a:t>4/28/2026</a:t>
             </a:fld>
             <a:endParaRPr lang="en-US"/>
           </a:p>
@@ -3696,6 +3698,762 @@
 </p:sld>
 </file>
 
+<file path=ppt/slides/slide3.xml><?xml version="1.0" encoding="utf-8"?>
+<p:sld xmlns:a="http://schemas.openxmlformats.org/drawingml/2006/main" xmlns:r="http://schemas.openxmlformats.org/officeDocument/2006/relationships" xmlns:p="http://schemas.openxmlformats.org/presentationml/2006/main">
+  <p:cSld>
+    <p:spTree>
+      <p:nvGrpSpPr>
+        <p:cNvPr id="1" name=""/>
+        <p:cNvGrpSpPr/>
+        <p:nvPr/>
+      </p:nvGrpSpPr>
+      <p:grpSpPr>
+        <a:xfrm>
+          <a:off x="0" y="0"/>
+          <a:ext cx="0" cy="0"/>
+          <a:chOff x="0" y="0"/>
+          <a:chExt cx="0" cy="0"/>
+        </a:xfrm>
+      </p:grpSpPr>
+      <p:pic>
+        <p:nvPicPr>
+          <p:cNvPr id="5" name="Picture 4">
+            <a:extLst>
+              <a:ext uri="{FF2B5EF4-FFF2-40B4-BE49-F238E27FC236}">
+                <a16:creationId xmlns:a16="http://schemas.microsoft.com/office/drawing/2014/main" id="{6A356F2A-EF4A-5932-D5D7-0B84D4AA002A}"/>
+              </a:ext>
+            </a:extLst>
+          </p:cNvPr>
+          <p:cNvPicPr>
+            <a:picLocks noChangeAspect="1"/>
+          </p:cNvPicPr>
+          <p:nvPr/>
+        </p:nvPicPr>
+        <p:blipFill>
+          <a:blip r:embed="rId2"/>
+          <a:stretch>
+            <a:fillRect/>
+          </a:stretch>
+        </p:blipFill>
+        <p:spPr>
+          <a:xfrm>
+            <a:off x="452382" y="915124"/>
+            <a:ext cx="5643618" cy="5214029"/>
+          </a:xfrm>
+          <a:prstGeom prst="rect">
+            <a:avLst/>
+          </a:prstGeom>
+        </p:spPr>
+      </p:pic>
+      <p:pic>
+        <p:nvPicPr>
+          <p:cNvPr id="7" name="Picture 6">
+            <a:extLst>
+              <a:ext uri="{FF2B5EF4-FFF2-40B4-BE49-F238E27FC236}">
+                <a16:creationId xmlns:a16="http://schemas.microsoft.com/office/drawing/2014/main" id="{B73D849E-D1A7-FE89-B555-7B7975E3378E}"/>
+              </a:ext>
+            </a:extLst>
+          </p:cNvPr>
+          <p:cNvPicPr>
+            <a:picLocks noChangeAspect="1"/>
+          </p:cNvPicPr>
+          <p:nvPr/>
+        </p:nvPicPr>
+        <p:blipFill>
+          <a:blip r:embed="rId3"/>
+          <a:srcRect t="36245"/>
+          <a:stretch/>
+        </p:blipFill>
+        <p:spPr>
+          <a:xfrm>
+            <a:off x="6454418" y="2661719"/>
+            <a:ext cx="5399182" cy="3467434"/>
+          </a:xfrm>
+          <a:prstGeom prst="rect">
+            <a:avLst/>
+          </a:prstGeom>
+        </p:spPr>
+      </p:pic>
+      <p:sp>
+        <p:nvSpPr>
+          <p:cNvPr id="8" name="TextBox 7">
+            <a:extLst>
+              <a:ext uri="{FF2B5EF4-FFF2-40B4-BE49-F238E27FC236}">
+                <a16:creationId xmlns:a16="http://schemas.microsoft.com/office/drawing/2014/main" id="{1055B19C-B429-0A2F-A451-3FB21CC21E92}"/>
+              </a:ext>
+            </a:extLst>
+          </p:cNvPr>
+          <p:cNvSpPr txBox="1"/>
+          <p:nvPr/>
+        </p:nvSpPr>
+        <p:spPr>
+          <a:xfrm>
+            <a:off x="1946494" y="6228741"/>
+            <a:ext cx="3168713" cy="369332"/>
+          </a:xfrm>
+          <a:prstGeom prst="rect">
+            <a:avLst/>
+          </a:prstGeom>
+          <a:noFill/>
+        </p:spPr>
+        <p:txBody>
+          <a:bodyPr wrap="square" rtlCol="0">
+            <a:spAutoFit/>
+          </a:bodyPr>
+          <a:lstStyle/>
+          <a:p>
+            <a:r>
+              <a:rPr lang="zh-CN" altLang="en-US" dirty="0"/>
+              <a:t>修正前可以看到异常的</a:t>
+            </a:r>
+            <a:r>
+              <a:rPr lang="en-US" altLang="zh-CN" dirty="0"/>
+              <a:t>H-H</a:t>
+            </a:r>
+            <a:r>
+              <a:rPr lang="zh-CN" altLang="en-US" dirty="0"/>
+              <a:t>键</a:t>
+            </a:r>
+            <a:endParaRPr lang="en-US" dirty="0"/>
+          </a:p>
+        </p:txBody>
+      </p:sp>
+      <p:sp>
+        <p:nvSpPr>
+          <p:cNvPr id="9" name="TextBox 8">
+            <a:extLst>
+              <a:ext uri="{FF2B5EF4-FFF2-40B4-BE49-F238E27FC236}">
+                <a16:creationId xmlns:a16="http://schemas.microsoft.com/office/drawing/2014/main" id="{EB303931-1843-91D1-9EBF-8EC22A9D921B}"/>
+              </a:ext>
+            </a:extLst>
+          </p:cNvPr>
+          <p:cNvSpPr txBox="1"/>
+          <p:nvPr/>
+        </p:nvSpPr>
+        <p:spPr>
+          <a:xfrm>
+            <a:off x="7503813" y="6228741"/>
+            <a:ext cx="3168713" cy="369332"/>
+          </a:xfrm>
+          <a:prstGeom prst="rect">
+            <a:avLst/>
+          </a:prstGeom>
+          <a:noFill/>
+        </p:spPr>
+        <p:txBody>
+          <a:bodyPr wrap="square" rtlCol="0">
+            <a:spAutoFit/>
+          </a:bodyPr>
+          <a:lstStyle/>
+          <a:p>
+            <a:r>
+              <a:rPr lang="zh-CN" altLang="en-US" dirty="0"/>
+              <a:t>修正后，</a:t>
+            </a:r>
+            <a:r>
+              <a:rPr lang="en-US" altLang="zh-CN" dirty="0"/>
+              <a:t>H-H</a:t>
+            </a:r>
+            <a:r>
+              <a:rPr lang="zh-CN" altLang="en-US" dirty="0"/>
+              <a:t>键被删除</a:t>
+            </a:r>
+            <a:endParaRPr lang="en-US" dirty="0"/>
+          </a:p>
+        </p:txBody>
+      </p:sp>
+      <p:sp>
+        <p:nvSpPr>
+          <p:cNvPr id="10" name="Oval 9">
+            <a:extLst>
+              <a:ext uri="{FF2B5EF4-FFF2-40B4-BE49-F238E27FC236}">
+                <a16:creationId xmlns:a16="http://schemas.microsoft.com/office/drawing/2014/main" id="{F808BE83-1D6C-D7F5-7AA1-C36E1AB9F8F1}"/>
+              </a:ext>
+            </a:extLst>
+          </p:cNvPr>
+          <p:cNvSpPr/>
+          <p:nvPr/>
+        </p:nvSpPr>
+        <p:spPr>
+          <a:xfrm rot="449838">
+            <a:off x="531007" y="4128379"/>
+            <a:ext cx="398353" cy="1231271"/>
+          </a:xfrm>
+          <a:prstGeom prst="ellipse">
+            <a:avLst/>
+          </a:prstGeom>
+          <a:solidFill>
+            <a:schemeClr val="accent1">
+              <a:alpha val="22000"/>
+            </a:schemeClr>
+          </a:solidFill>
+        </p:spPr>
+        <p:style>
+          <a:lnRef idx="2">
+            <a:schemeClr val="accent1">
+              <a:shade val="15000"/>
+            </a:schemeClr>
+          </a:lnRef>
+          <a:fillRef idx="1">
+            <a:schemeClr val="accent1"/>
+          </a:fillRef>
+          <a:effectRef idx="0">
+            <a:schemeClr val="accent1"/>
+          </a:effectRef>
+          <a:fontRef idx="minor">
+            <a:schemeClr val="lt1"/>
+          </a:fontRef>
+        </p:style>
+        <p:txBody>
+          <a:bodyPr rtlCol="0" anchor="ctr"/>
+          <a:lstStyle/>
+          <a:p>
+            <a:pPr algn="ctr"/>
+            <a:endParaRPr lang="en-US"/>
+          </a:p>
+        </p:txBody>
+      </p:sp>
+      <p:cxnSp>
+        <p:nvCxnSpPr>
+          <p:cNvPr id="12" name="Straight Arrow Connector 11">
+            <a:extLst>
+              <a:ext uri="{FF2B5EF4-FFF2-40B4-BE49-F238E27FC236}">
+                <a16:creationId xmlns:a16="http://schemas.microsoft.com/office/drawing/2014/main" id="{0EB56643-8D85-3E38-A93C-E1E465D8AA14}"/>
+              </a:ext>
+            </a:extLst>
+          </p:cNvPr>
+          <p:cNvCxnSpPr>
+            <a:cxnSpLocks/>
+          </p:cNvCxnSpPr>
+          <p:nvPr/>
+        </p:nvCxnSpPr>
+        <p:spPr>
+          <a:xfrm flipH="1" flipV="1">
+            <a:off x="730183" y="5380376"/>
+            <a:ext cx="129896" cy="562500"/>
+          </a:xfrm>
+          <a:prstGeom prst="straightConnector1">
+            <a:avLst/>
+          </a:prstGeom>
+          <a:ln>
+            <a:tailEnd type="triangle"/>
+          </a:ln>
+        </p:spPr>
+        <p:style>
+          <a:lnRef idx="2">
+            <a:schemeClr val="dk1"/>
+          </a:lnRef>
+          <a:fillRef idx="0">
+            <a:schemeClr val="dk1"/>
+          </a:fillRef>
+          <a:effectRef idx="1">
+            <a:schemeClr val="dk1"/>
+          </a:effectRef>
+          <a:fontRef idx="minor">
+            <a:schemeClr val="tx1"/>
+          </a:fontRef>
+        </p:style>
+      </p:cxnSp>
+      <p:pic>
+        <p:nvPicPr>
+          <p:cNvPr id="15" name="Picture 14">
+            <a:extLst>
+              <a:ext uri="{FF2B5EF4-FFF2-40B4-BE49-F238E27FC236}">
+                <a16:creationId xmlns:a16="http://schemas.microsoft.com/office/drawing/2014/main" id="{86BE20EA-4ED4-5C3E-BF5A-EB67691363AB}"/>
+              </a:ext>
+            </a:extLst>
+          </p:cNvPr>
+          <p:cNvPicPr>
+            <a:picLocks noChangeAspect="1"/>
+          </p:cNvPicPr>
+          <p:nvPr/>
+        </p:nvPicPr>
+        <p:blipFill>
+          <a:blip r:embed="rId4"/>
+          <a:stretch>
+            <a:fillRect/>
+          </a:stretch>
+        </p:blipFill>
+        <p:spPr>
+          <a:xfrm>
+            <a:off x="6023572" y="2094902"/>
+            <a:ext cx="1076475" cy="1133633"/>
+          </a:xfrm>
+          <a:prstGeom prst="rect">
+            <a:avLst/>
+          </a:prstGeom>
+        </p:spPr>
+      </p:pic>
+      <p:sp>
+        <p:nvSpPr>
+          <p:cNvPr id="16" name="Oval 15">
+            <a:extLst>
+              <a:ext uri="{FF2B5EF4-FFF2-40B4-BE49-F238E27FC236}">
+                <a16:creationId xmlns:a16="http://schemas.microsoft.com/office/drawing/2014/main" id="{94A23BC3-E663-C15E-EAC8-E416F7272B43}"/>
+              </a:ext>
+            </a:extLst>
+          </p:cNvPr>
+          <p:cNvSpPr/>
+          <p:nvPr/>
+        </p:nvSpPr>
+        <p:spPr>
+          <a:xfrm rot="256300">
+            <a:off x="6419104" y="4215571"/>
+            <a:ext cx="398353" cy="1231271"/>
+          </a:xfrm>
+          <a:prstGeom prst="ellipse">
+            <a:avLst/>
+          </a:prstGeom>
+          <a:solidFill>
+            <a:schemeClr val="accent1">
+              <a:alpha val="22000"/>
+            </a:schemeClr>
+          </a:solidFill>
+        </p:spPr>
+        <p:style>
+          <a:lnRef idx="2">
+            <a:schemeClr val="accent1">
+              <a:shade val="15000"/>
+            </a:schemeClr>
+          </a:lnRef>
+          <a:fillRef idx="1">
+            <a:schemeClr val="accent1"/>
+          </a:fillRef>
+          <a:effectRef idx="0">
+            <a:schemeClr val="accent1"/>
+          </a:effectRef>
+          <a:fontRef idx="minor">
+            <a:schemeClr val="lt1"/>
+          </a:fontRef>
+        </p:style>
+        <p:txBody>
+          <a:bodyPr rtlCol="0" anchor="ctr"/>
+          <a:lstStyle/>
+          <a:p>
+            <a:pPr algn="ctr"/>
+            <a:endParaRPr lang="en-US"/>
+          </a:p>
+        </p:txBody>
+      </p:sp>
+      <p:cxnSp>
+        <p:nvCxnSpPr>
+          <p:cNvPr id="17" name="Straight Arrow Connector 16">
+            <a:extLst>
+              <a:ext uri="{FF2B5EF4-FFF2-40B4-BE49-F238E27FC236}">
+                <a16:creationId xmlns:a16="http://schemas.microsoft.com/office/drawing/2014/main" id="{D7DA7E79-F5F2-7437-8DB0-A6F51CF0B481}"/>
+              </a:ext>
+            </a:extLst>
+          </p:cNvPr>
+          <p:cNvCxnSpPr>
+            <a:cxnSpLocks/>
+          </p:cNvCxnSpPr>
+          <p:nvPr/>
+        </p:nvCxnSpPr>
+        <p:spPr>
+          <a:xfrm flipH="1" flipV="1">
+            <a:off x="6618280" y="5486283"/>
+            <a:ext cx="129896" cy="562500"/>
+          </a:xfrm>
+          <a:prstGeom prst="straightConnector1">
+            <a:avLst/>
+          </a:prstGeom>
+          <a:ln>
+            <a:tailEnd type="triangle"/>
+          </a:ln>
+        </p:spPr>
+        <p:style>
+          <a:lnRef idx="2">
+            <a:schemeClr val="dk1"/>
+          </a:lnRef>
+          <a:fillRef idx="0">
+            <a:schemeClr val="dk1"/>
+          </a:fillRef>
+          <a:effectRef idx="1">
+            <a:schemeClr val="dk1"/>
+          </a:effectRef>
+          <a:fontRef idx="minor">
+            <a:schemeClr val="tx1"/>
+          </a:fontRef>
+        </p:style>
+      </p:cxnSp>
+    </p:spTree>
+    <p:extLst>
+      <p:ext uri="{BB962C8B-B14F-4D97-AF65-F5344CB8AC3E}">
+        <p14:creationId xmlns:p14="http://schemas.microsoft.com/office/powerpoint/2010/main" val="2920674416"/>
+      </p:ext>
+    </p:extLst>
+  </p:cSld>
+  <p:clrMapOvr>
+    <a:masterClrMapping/>
+  </p:clrMapOvr>
+</p:sld>
+</file>
+
+<file path=ppt/slides/slide4.xml><?xml version="1.0" encoding="utf-8"?>
+<p:sld xmlns:a="http://schemas.openxmlformats.org/drawingml/2006/main" xmlns:r="http://schemas.openxmlformats.org/officeDocument/2006/relationships" xmlns:p="http://schemas.openxmlformats.org/presentationml/2006/main">
+  <p:cSld>
+    <p:spTree>
+      <p:nvGrpSpPr>
+        <p:cNvPr id="1" name=""/>
+        <p:cNvGrpSpPr/>
+        <p:nvPr/>
+      </p:nvGrpSpPr>
+      <p:grpSpPr>
+        <a:xfrm>
+          <a:off x="0" y="0"/>
+          <a:ext cx="0" cy="0"/>
+          <a:chOff x="0" y="0"/>
+          <a:chExt cx="0" cy="0"/>
+        </a:xfrm>
+      </p:grpSpPr>
+      <p:pic>
+        <p:nvPicPr>
+          <p:cNvPr id="5" name="Picture 4">
+            <a:extLst>
+              <a:ext uri="{FF2B5EF4-FFF2-40B4-BE49-F238E27FC236}">
+                <a16:creationId xmlns:a16="http://schemas.microsoft.com/office/drawing/2014/main" id="{2BB9C96C-B605-8B17-E6AA-1EE2E5F0C5B0}"/>
+              </a:ext>
+            </a:extLst>
+          </p:cNvPr>
+          <p:cNvPicPr>
+            <a:picLocks noChangeAspect="1"/>
+          </p:cNvPicPr>
+          <p:nvPr/>
+        </p:nvPicPr>
+        <p:blipFill>
+          <a:blip r:embed="rId2"/>
+          <a:stretch>
+            <a:fillRect/>
+          </a:stretch>
+        </p:blipFill>
+        <p:spPr>
+          <a:xfrm>
+            <a:off x="4266944" y="2271551"/>
+            <a:ext cx="3658111" cy="2314898"/>
+          </a:xfrm>
+          <a:prstGeom prst="rect">
+            <a:avLst/>
+          </a:prstGeom>
+        </p:spPr>
+      </p:pic>
+      <p:sp>
+        <p:nvSpPr>
+          <p:cNvPr id="6" name="Left Bracket 5">
+            <a:extLst>
+              <a:ext uri="{FF2B5EF4-FFF2-40B4-BE49-F238E27FC236}">
+                <a16:creationId xmlns:a16="http://schemas.microsoft.com/office/drawing/2014/main" id="{5BC0794A-3977-EE7D-42EC-3448B3972869}"/>
+              </a:ext>
+            </a:extLst>
+          </p:cNvPr>
+          <p:cNvSpPr/>
+          <p:nvPr/>
+        </p:nvSpPr>
+        <p:spPr>
+          <a:xfrm>
+            <a:off x="4662536" y="2516863"/>
+            <a:ext cx="144854" cy="1964602"/>
+          </a:xfrm>
+          <a:prstGeom prst="leftBracket">
+            <a:avLst>
+              <a:gd name="adj" fmla="val 0"/>
+            </a:avLst>
+          </a:prstGeom>
+          <a:ln>
+            <a:solidFill>
+              <a:schemeClr val="tx1"/>
+            </a:solidFill>
+          </a:ln>
+        </p:spPr>
+        <p:style>
+          <a:lnRef idx="2">
+            <a:schemeClr val="accent1"/>
+          </a:lnRef>
+          <a:fillRef idx="0">
+            <a:schemeClr val="accent1"/>
+          </a:fillRef>
+          <a:effectRef idx="1">
+            <a:schemeClr val="accent1"/>
+          </a:effectRef>
+          <a:fontRef idx="minor">
+            <a:schemeClr val="tx1"/>
+          </a:fontRef>
+        </p:style>
+        <p:txBody>
+          <a:bodyPr rtlCol="0" anchor="ctr"/>
+          <a:lstStyle/>
+          <a:p>
+            <a:pPr algn="ctr"/>
+            <a:endParaRPr lang="en-US"/>
+          </a:p>
+        </p:txBody>
+      </p:sp>
+      <p:sp>
+        <p:nvSpPr>
+          <p:cNvPr id="7" name="Left Bracket 6">
+            <a:extLst>
+              <a:ext uri="{FF2B5EF4-FFF2-40B4-BE49-F238E27FC236}">
+                <a16:creationId xmlns:a16="http://schemas.microsoft.com/office/drawing/2014/main" id="{5C56969D-B29E-6A50-4EFA-309A30768CAA}"/>
+              </a:ext>
+            </a:extLst>
+          </p:cNvPr>
+          <p:cNvSpPr/>
+          <p:nvPr/>
+        </p:nvSpPr>
+        <p:spPr>
+          <a:xfrm flipH="1">
+            <a:off x="7239758" y="2516863"/>
+            <a:ext cx="144854" cy="1964602"/>
+          </a:xfrm>
+          <a:prstGeom prst="leftBracket">
+            <a:avLst>
+              <a:gd name="adj" fmla="val 0"/>
+            </a:avLst>
+          </a:prstGeom>
+          <a:ln>
+            <a:solidFill>
+              <a:schemeClr val="tx1"/>
+            </a:solidFill>
+          </a:ln>
+        </p:spPr>
+        <p:style>
+          <a:lnRef idx="2">
+            <a:schemeClr val="accent1"/>
+          </a:lnRef>
+          <a:fillRef idx="0">
+            <a:schemeClr val="accent1"/>
+          </a:fillRef>
+          <a:effectRef idx="1">
+            <a:schemeClr val="accent1"/>
+          </a:effectRef>
+          <a:fontRef idx="minor">
+            <a:schemeClr val="tx1"/>
+          </a:fontRef>
+        </p:style>
+        <p:txBody>
+          <a:bodyPr rtlCol="0" anchor="ctr"/>
+          <a:lstStyle/>
+          <a:p>
+            <a:pPr algn="ctr"/>
+            <a:endParaRPr lang="en-US"/>
+          </a:p>
+        </p:txBody>
+      </p:sp>
+      <p:sp>
+        <p:nvSpPr>
+          <p:cNvPr id="8" name="TextBox 7">
+            <a:extLst>
+              <a:ext uri="{FF2B5EF4-FFF2-40B4-BE49-F238E27FC236}">
+                <a16:creationId xmlns:a16="http://schemas.microsoft.com/office/drawing/2014/main" id="{F4F16322-7B6A-AECB-E957-ADEA8F7C428B}"/>
+              </a:ext>
+            </a:extLst>
+          </p:cNvPr>
+          <p:cNvSpPr txBox="1"/>
+          <p:nvPr/>
+        </p:nvSpPr>
+        <p:spPr>
+          <a:xfrm>
+            <a:off x="7384355" y="4309450"/>
+            <a:ext cx="244444" cy="369332"/>
+          </a:xfrm>
+          <a:prstGeom prst="rect">
+            <a:avLst/>
+          </a:prstGeom>
+          <a:noFill/>
+        </p:spPr>
+        <p:txBody>
+          <a:bodyPr wrap="square" rtlCol="0">
+            <a:spAutoFit/>
+          </a:bodyPr>
+          <a:lstStyle/>
+          <a:p>
+            <a:r>
+              <a:rPr lang="en-US" dirty="0"/>
+              <a:t>5</a:t>
+            </a:r>
+          </a:p>
+        </p:txBody>
+      </p:sp>
+      <p:sp>
+        <p:nvSpPr>
+          <p:cNvPr id="9" name="Right Brace 8">
+            <a:extLst>
+              <a:ext uri="{FF2B5EF4-FFF2-40B4-BE49-F238E27FC236}">
+                <a16:creationId xmlns:a16="http://schemas.microsoft.com/office/drawing/2014/main" id="{122D9D84-3EFE-9715-4982-33E6B7BE36E5}"/>
+              </a:ext>
+            </a:extLst>
+          </p:cNvPr>
+          <p:cNvSpPr/>
+          <p:nvPr/>
+        </p:nvSpPr>
+        <p:spPr>
+          <a:xfrm rot="5400000">
+            <a:off x="5282444" y="4049314"/>
+            <a:ext cx="244444" cy="1014494"/>
+          </a:xfrm>
+          <a:prstGeom prst="rightBrace">
+            <a:avLst/>
+          </a:prstGeom>
+          <a:ln>
+            <a:solidFill>
+              <a:schemeClr val="tx1"/>
+            </a:solidFill>
+          </a:ln>
+        </p:spPr>
+        <p:style>
+          <a:lnRef idx="2">
+            <a:schemeClr val="accent1"/>
+          </a:lnRef>
+          <a:fillRef idx="0">
+            <a:schemeClr val="accent1"/>
+          </a:fillRef>
+          <a:effectRef idx="1">
+            <a:schemeClr val="accent1"/>
+          </a:effectRef>
+          <a:fontRef idx="minor">
+            <a:schemeClr val="tx1"/>
+          </a:fontRef>
+        </p:style>
+        <p:txBody>
+          <a:bodyPr rtlCol="0" anchor="ctr"/>
+          <a:lstStyle/>
+          <a:p>
+            <a:pPr algn="ctr"/>
+            <a:endParaRPr lang="en-US"/>
+          </a:p>
+        </p:txBody>
+      </p:sp>
+      <p:sp>
+        <p:nvSpPr>
+          <p:cNvPr id="10" name="TextBox 9">
+            <a:extLst>
+              <a:ext uri="{FF2B5EF4-FFF2-40B4-BE49-F238E27FC236}">
+                <a16:creationId xmlns:a16="http://schemas.microsoft.com/office/drawing/2014/main" id="{34342494-4ABA-C728-1CD4-5010467FC67C}"/>
+              </a:ext>
+            </a:extLst>
+          </p:cNvPr>
+          <p:cNvSpPr txBox="1"/>
+          <p:nvPr/>
+        </p:nvSpPr>
+        <p:spPr>
+          <a:xfrm>
+            <a:off x="5042527" y="4678782"/>
+            <a:ext cx="724277" cy="369332"/>
+          </a:xfrm>
+          <a:prstGeom prst="rect">
+            <a:avLst/>
+          </a:prstGeom>
+          <a:noFill/>
+        </p:spPr>
+        <p:txBody>
+          <a:bodyPr wrap="square" rtlCol="0">
+            <a:spAutoFit/>
+          </a:bodyPr>
+          <a:lstStyle/>
+          <a:p>
+            <a:r>
+              <a:rPr lang="en-US" dirty="0"/>
+              <a:t>CLSA</a:t>
+            </a:r>
+          </a:p>
+        </p:txBody>
+      </p:sp>
+      <p:sp>
+        <p:nvSpPr>
+          <p:cNvPr id="11" name="Right Brace 10">
+            <a:extLst>
+              <a:ext uri="{FF2B5EF4-FFF2-40B4-BE49-F238E27FC236}">
+                <a16:creationId xmlns:a16="http://schemas.microsoft.com/office/drawing/2014/main" id="{C34B3D23-33C6-0037-18D1-0BE3746B186E}"/>
+              </a:ext>
+            </a:extLst>
+          </p:cNvPr>
+          <p:cNvSpPr/>
+          <p:nvPr/>
+        </p:nvSpPr>
+        <p:spPr>
+          <a:xfrm rot="5400000">
+            <a:off x="6642912" y="4099041"/>
+            <a:ext cx="244444" cy="942195"/>
+          </a:xfrm>
+          <a:prstGeom prst="rightBrace">
+            <a:avLst/>
+          </a:prstGeom>
+          <a:ln>
+            <a:solidFill>
+              <a:schemeClr val="tx1"/>
+            </a:solidFill>
+          </a:ln>
+        </p:spPr>
+        <p:style>
+          <a:lnRef idx="2">
+            <a:schemeClr val="accent1"/>
+          </a:lnRef>
+          <a:fillRef idx="0">
+            <a:schemeClr val="accent1"/>
+          </a:fillRef>
+          <a:effectRef idx="1">
+            <a:schemeClr val="accent1"/>
+          </a:effectRef>
+          <a:fontRef idx="minor">
+            <a:schemeClr val="tx1"/>
+          </a:fontRef>
+        </p:style>
+        <p:txBody>
+          <a:bodyPr rtlCol="0" anchor="ctr"/>
+          <a:lstStyle/>
+          <a:p>
+            <a:pPr algn="ctr"/>
+            <a:endParaRPr lang="en-US"/>
+          </a:p>
+        </p:txBody>
+      </p:sp>
+      <p:sp>
+        <p:nvSpPr>
+          <p:cNvPr id="12" name="TextBox 11">
+            <a:extLst>
+              <a:ext uri="{FF2B5EF4-FFF2-40B4-BE49-F238E27FC236}">
+                <a16:creationId xmlns:a16="http://schemas.microsoft.com/office/drawing/2014/main" id="{17B3AC36-D77E-B021-D551-D48E259CF397}"/>
+              </a:ext>
+            </a:extLst>
+          </p:cNvPr>
+          <p:cNvSpPr txBox="1"/>
+          <p:nvPr/>
+        </p:nvSpPr>
+        <p:spPr>
+          <a:xfrm>
+            <a:off x="6425198" y="4692361"/>
+            <a:ext cx="724277" cy="369332"/>
+          </a:xfrm>
+          <a:prstGeom prst="rect">
+            <a:avLst/>
+          </a:prstGeom>
+          <a:noFill/>
+        </p:spPr>
+        <p:txBody>
+          <a:bodyPr wrap="square" rtlCol="0">
+            <a:spAutoFit/>
+          </a:bodyPr>
+          <a:lstStyle/>
+          <a:p>
+            <a:r>
+              <a:rPr lang="en-US" dirty="0"/>
+              <a:t>CLSB</a:t>
+            </a:r>
+          </a:p>
+        </p:txBody>
+      </p:sp>
+    </p:spTree>
+    <p:extLst>
+      <p:ext uri="{BB962C8B-B14F-4D97-AF65-F5344CB8AC3E}">
+        <p14:creationId xmlns:p14="http://schemas.microsoft.com/office/powerpoint/2010/main" val="4199174760"/>
+      </p:ext>
+    </p:extLst>
+  </p:cSld>
+  <p:clrMapOvr>
+    <a:masterClrMapping/>
+  </p:clrMapOvr>
+</p:sld>
+</file>
+
 <file path=ppt/theme/theme1.xml><?xml version="1.0" encoding="utf-8"?>
 <a:theme xmlns:a="http://schemas.openxmlformats.org/drawingml/2006/main" name="Office Theme">
   <a:themeElements>
